--- a/cursos/recursos/arbitro-nacional/01-cuando-una-jugada-queda-completada-y-que-obliga-a-jugar-la-pieza-tocada.pptx
+++ b/cursos/recursos/arbitro-nacional/01-cuando-una-jugada-queda-completada-y-que-obliga-a-jugar-la-pieza-tocada.pptx
@@ -3955,7 +3955,7 @@
                 </a:solidFill>
                 <a:latin typeface="Calibri"/>
               </a:rPr>
-              <a:t>Una jugada queda completada, según el artículo 4, cuando la mano suelta la pieza en su casilla de destino (o, en la captura, después de retirar la pieza capturada y colocar la propia). Presionar el reloj es un acto aparte, del artículo 6: la jugada ya está hecha antes de tocar el reloj, así que un jugador no puede "deshacer" una jugada terminada alegando que todavía no presionó.</a:t>
+              <a:t>Hay dos momentos que no son el mismo, y confundirlos es el error más común. La jugada queda HECHA cuando la mano suelta la pieza en su casilla de destino (art. 4.7): a partir de ahí no se puede mover a otra casilla. Pero queda COMPLETADA recién al presionar el reloj (art. 6.2.1) — y hasta ese momento, aunque ya haya soltado la pieza, el jugador todavía puede corregirla y jugar otra cosa (respetando la pieza tocada), porque una jugada no se puede declarar ilegal hasta que el reloj quedó presionado (art. 7.5.1).</a:t>
             </a:r>
           </a:p>
         </p:txBody>
